--- a/ppt/15.C언어-동적-메모리.pptx
+++ b/ppt/15.C언어-동적-메모리.pptx
@@ -34,23 +34,23 @@
   <p:notesSz cx="6858000" cy="9144000"/>
   <p:embeddedFontLst>
     <p:embeddedFont>
-      <p:font typeface="D2Coding" panose="020B0609020101020101" pitchFamily="49" charset="-127"/>
+      <p:font typeface="가을체" panose="020B0600000101010101" charset="-127"/>
       <p:regular r:id="rId24"/>
-      <p:bold r:id="rId25"/>
     </p:embeddedFont>
     <p:embeddedFont>
       <p:font typeface="Consolas" panose="020B0609020204030204" pitchFamily="49" charset="0"/>
-      <p:regular r:id="rId26"/>
-      <p:bold r:id="rId27"/>
-      <p:italic r:id="rId28"/>
-      <p:boldItalic r:id="rId29"/>
+      <p:regular r:id="rId25"/>
+      <p:bold r:id="rId26"/>
+      <p:italic r:id="rId27"/>
+      <p:boldItalic r:id="rId28"/>
+    </p:embeddedFont>
+    <p:embeddedFont>
+      <p:font typeface="D2Coding" panose="020B0609020101020101" pitchFamily="49" charset="-127"/>
+      <p:regular r:id="rId29"/>
+      <p:bold r:id="rId30"/>
     </p:embeddedFont>
     <p:embeddedFont>
       <p:font typeface="HY견고딕" panose="02030600000101010101" pitchFamily="18" charset="-127"/>
-      <p:regular r:id="rId30"/>
-    </p:embeddedFont>
-    <p:embeddedFont>
-      <p:font typeface="가을체" panose="02030600000101010101" pitchFamily="18" charset="-127"/>
       <p:regular r:id="rId31"/>
     </p:embeddedFont>
     <p:embeddedFont>
@@ -8945,123 +8945,132 @@
           <a:lstStyle/>
           <a:p>
             <a:r>
-              <a:rPr lang="ko-KR" altLang="en-US" sz="2400"/>
+              <a:rPr lang="ko-KR" altLang="en-US" sz="2400" dirty="0"/>
               <a:t>기본 원칙</a:t>
             </a:r>
-            <a:endParaRPr lang="en-US" altLang="ko-KR" sz="2400"/>
+            <a:endParaRPr lang="en-US" altLang="ko-KR" sz="2400" dirty="0"/>
           </a:p>
           <a:p>
             <a:pPr lvl="1"/>
             <a:r>
-              <a:rPr lang="ko-KR" altLang="en-US" sz="2000"/>
+              <a:rPr lang="ko-KR" altLang="en-US" sz="2000" dirty="0"/>
               <a:t>할당</a:t>
             </a:r>
             <a:r>
-              <a:rPr lang="en-US" altLang="ko-KR" sz="2000"/>
+              <a:rPr lang="en-US" altLang="ko-KR" sz="2000" dirty="0"/>
               <a:t>/ </a:t>
             </a:r>
             <a:r>
-              <a:rPr lang="ko-KR" altLang="en-US" sz="2000"/>
-              <a:t>해제 한쌍</a:t>
-            </a:r>
+              <a:rPr lang="ko-KR" altLang="en-US" sz="2000" dirty="0"/>
+              <a:t>해제 </a:t>
+            </a:r>
+            <a:r>
+              <a:rPr lang="ko-KR" altLang="en-US" sz="2000" dirty="0" err="1"/>
+              <a:t>한쌍</a:t>
+            </a:r>
+            <a:endParaRPr lang="ko-KR" altLang="en-US" sz="2000" dirty="0"/>
           </a:p>
           <a:p>
             <a:pPr lvl="1"/>
             <a:r>
-              <a:rPr lang="en-US" altLang="ko-KR" sz="2000"/>
+              <a:rPr lang="en-US" altLang="ko-KR" sz="2000" dirty="0"/>
               <a:t>malloc → free </a:t>
             </a:r>
             <a:r>
-              <a:rPr lang="ko-KR" altLang="en-US" sz="2000"/>
+              <a:rPr lang="ko-KR" altLang="en-US" sz="2000" dirty="0"/>
               <a:t>반드시 호출</a:t>
             </a:r>
-            <a:endParaRPr lang="en-US" altLang="ko-KR" sz="2000"/>
+            <a:endParaRPr lang="en-US" altLang="ko-KR" sz="2000" dirty="0"/>
           </a:p>
           <a:p>
             <a:pPr lvl="2"/>
-            <a:endParaRPr lang="ko-KR" altLang="en-US" sz="1800"/>
-          </a:p>
-          <a:p>
-            <a:r>
-              <a:rPr lang="ko-KR" altLang="en-US" sz="2400"/>
-              <a:t>댕글링 포인터 방지</a:t>
-            </a:r>
-            <a:endParaRPr lang="en-US" altLang="ko-KR" sz="2400"/>
+            <a:endParaRPr lang="ko-KR" altLang="en-US" sz="1800" dirty="0"/>
+          </a:p>
+          <a:p>
+            <a:r>
+              <a:rPr lang="ko-KR" altLang="en-US" sz="2400" dirty="0" err="1"/>
+              <a:t>댕글링</a:t>
+            </a:r>
+            <a:r>
+              <a:rPr lang="ko-KR" altLang="en-US" sz="2400" dirty="0"/>
+              <a:t> 포인터 방지</a:t>
+            </a:r>
+            <a:endParaRPr lang="en-US" altLang="ko-KR" sz="2400" dirty="0"/>
           </a:p>
           <a:p>
             <a:pPr lvl="1"/>
             <a:r>
-              <a:rPr lang="ko-KR" altLang="en-US" sz="2000"/>
+              <a:rPr lang="ko-KR" altLang="en-US" sz="2000" dirty="0"/>
               <a:t>해제된 메모리를 가리키는 포인터</a:t>
             </a:r>
             <a:br>
-              <a:rPr lang="en-US" altLang="ko-KR" sz="2000"/>
+              <a:rPr lang="en-US" altLang="ko-KR" sz="2000" dirty="0"/>
             </a:br>
             <a:r>
-              <a:rPr lang="ko-KR" altLang="en-US" sz="2000"/>
+              <a:rPr lang="ko-KR" altLang="en-US" sz="2000" dirty="0"/>
               <a:t>→ 접근 시 오류 발생 가능 </a:t>
             </a:r>
           </a:p>
           <a:p>
             <a:pPr lvl="1"/>
             <a:r>
-              <a:rPr lang="en-US" altLang="ko-KR" sz="2000"/>
+              <a:rPr lang="en-US" altLang="ko-KR" sz="2000" dirty="0"/>
               <a:t>free </a:t>
             </a:r>
             <a:r>
-              <a:rPr lang="ko-KR" altLang="en-US" sz="2000"/>
+              <a:rPr lang="ko-KR" altLang="en-US" sz="2000" dirty="0"/>
               <a:t>이후 → 포인터를 </a:t>
             </a:r>
             <a:r>
-              <a:rPr lang="en-US" altLang="ko-KR" sz="2000"/>
+              <a:rPr lang="en-US" altLang="ko-KR" sz="2000" dirty="0"/>
               <a:t>NULL</a:t>
             </a:r>
             <a:r>
-              <a:rPr lang="ko-KR" altLang="en-US" sz="2000"/>
+              <a:rPr lang="ko-KR" altLang="en-US" sz="2000" dirty="0"/>
               <a:t>로 설정</a:t>
             </a:r>
-            <a:endParaRPr lang="en-US" altLang="ko-KR" sz="2000"/>
+            <a:endParaRPr lang="en-US" altLang="ko-KR" sz="2000" dirty="0"/>
           </a:p>
           <a:p>
             <a:pPr lvl="2"/>
-            <a:endParaRPr lang="en-US" altLang="ko-KR" sz="1800"/>
-          </a:p>
-          <a:p>
-            <a:r>
-              <a:rPr lang="ko-KR" altLang="en-US" sz="2400"/>
+            <a:endParaRPr lang="en-US" altLang="ko-KR" sz="1800" dirty="0"/>
+          </a:p>
+          <a:p>
+            <a:r>
+              <a:rPr lang="ko-KR" altLang="en-US" sz="2400" dirty="0"/>
               <a:t>소유권 </a:t>
             </a:r>
             <a:r>
-              <a:rPr lang="en-US" altLang="ko-KR" sz="2400"/>
+              <a:rPr lang="en-US" altLang="ko-KR" sz="2400" dirty="0"/>
               <a:t>(Ownership)</a:t>
             </a:r>
           </a:p>
           <a:p>
             <a:pPr lvl="1"/>
             <a:r>
-              <a:rPr lang="ko-KR" altLang="en-US" sz="2000"/>
+              <a:rPr lang="ko-KR" altLang="en-US" sz="2000" dirty="0"/>
               <a:t>메모리는 한 번만 해제 </a:t>
             </a:r>
           </a:p>
           <a:p>
             <a:pPr lvl="1"/>
             <a:r>
-              <a:rPr lang="ko-KR" altLang="en-US" sz="2000"/>
+              <a:rPr lang="ko-KR" altLang="en-US" sz="2000" dirty="0"/>
               <a:t>누가 해제할지 명확히 정의 </a:t>
             </a:r>
           </a:p>
           <a:p>
             <a:pPr lvl="1"/>
             <a:r>
-              <a:rPr lang="ko-KR" altLang="en-US" sz="2000"/>
+              <a:rPr lang="ko-KR" altLang="en-US" sz="2000" dirty="0"/>
               <a:t>반환 받은 쪽이 해제 책임</a:t>
             </a:r>
-            <a:endParaRPr lang="en-US" altLang="ko-KR" sz="2000"/>
+            <a:endParaRPr lang="en-US" altLang="ko-KR" sz="2000" dirty="0"/>
           </a:p>
           <a:p>
             <a:pPr lvl="1"/>
             <a:r>
-              <a:rPr lang="ko-KR" altLang="en-US" sz="2000"/>
+              <a:rPr lang="ko-KR" altLang="en-US" sz="2000" dirty="0"/>
               <a:t>생성자 역할 함수 사용</a:t>
             </a:r>
             <a:endParaRPr lang="en-US" altLang="ko-KR" sz="2000" dirty="0"/>
@@ -14205,6 +14214,10 @@
             <a:endParaRPr lang="en-US" altLang="ko-KR" sz="2800" dirty="0"/>
           </a:p>
           <a:p>
+            <a:pPr lvl="2"/>
+            <a:endParaRPr lang="en-US" altLang="ko-KR" sz="2400" dirty="0"/>
+          </a:p>
+          <a:p>
             <a:pPr lvl="1"/>
             <a:r>
               <a:rPr lang="ko-KR" altLang="en-US" sz="2800" dirty="0"/>
@@ -14249,6 +14262,10 @@
               <a:rPr lang="en-US" altLang="ko-KR" sz="2800" dirty="0"/>
               <a:t>(Stack)</a:t>
             </a:r>
+          </a:p>
+          <a:p>
+            <a:pPr lvl="2"/>
+            <a:endParaRPr lang="en-US" altLang="ko-KR" sz="2400" dirty="0"/>
           </a:p>
           <a:p>
             <a:pPr lvl="1"/>
@@ -14970,15 +14987,7 @@
             </a:r>
             <a:r>
               <a:rPr lang="en-US" altLang="ko-KR" dirty="0"/>
-              <a:t>(</a:t>
-            </a:r>
-            <a:r>
-              <a:rPr lang="en-US" altLang="ko-KR" dirty="0" err="1"/>
-              <a:t>SplitString</a:t>
-            </a:r>
-            <a:r>
-              <a:rPr lang="en-US" altLang="ko-KR" dirty="0"/>
-              <a:t>) </a:t>
+              <a:t>(Split String) </a:t>
             </a:r>
           </a:p>
           <a:p>
@@ -15957,8 +15966,8 @@
         </p:nvSpPr>
         <p:spPr>
           <a:xfrm>
-            <a:off x="755576" y="3580370"/>
-            <a:ext cx="7200800" cy="646331"/>
+            <a:off x="395536" y="3429000"/>
+            <a:ext cx="7992888" cy="707886"/>
           </a:xfrm>
           <a:prstGeom prst="rect">
             <a:avLst/>
@@ -15980,7 +15989,7 @@
           <a:lstStyle/>
           <a:p>
             <a:r>
-              <a:rPr lang="en-US" altLang="ko-KR" sz="1800" b="0" i="0" u="none" strike="noStrike" dirty="0">
+              <a:rPr lang="en-US" altLang="ko-KR" sz="2000" b="1" i="0" u="none" strike="noStrike" dirty="0">
                 <a:solidFill>
                   <a:srgbClr val="A626A4"/>
                 </a:solidFill>
@@ -15990,7 +15999,7 @@
               <a:t>int</a:t>
             </a:r>
             <a:r>
-              <a:rPr lang="en-US" altLang="ko-KR" sz="1800" b="0" i="0" u="none" strike="noStrike" dirty="0">
+              <a:rPr lang="en-US" altLang="ko-KR" sz="2000" b="1" i="0" u="none" strike="noStrike" dirty="0">
                 <a:solidFill>
                   <a:srgbClr val="383A42"/>
                 </a:solidFill>
@@ -16000,7 +16009,7 @@
               <a:t> arr[</a:t>
             </a:r>
             <a:r>
-              <a:rPr lang="en-US" altLang="ko-KR" sz="1800" b="0" i="0" u="none" strike="noStrike" dirty="0">
+              <a:rPr lang="en-US" altLang="ko-KR" sz="2000" b="1" i="0" u="none" strike="noStrike" dirty="0">
                 <a:solidFill>
                   <a:srgbClr val="986801"/>
                 </a:solidFill>
@@ -16010,7 +16019,7 @@
               <a:t>4</a:t>
             </a:r>
             <a:r>
-              <a:rPr lang="en-US" altLang="ko-KR" sz="1800" b="0" i="0" u="none" strike="noStrike" dirty="0">
+              <a:rPr lang="en-US" altLang="ko-KR" sz="2000" b="1" i="0" u="none" strike="noStrike" dirty="0">
                 <a:solidFill>
                   <a:srgbClr val="383A42"/>
                 </a:solidFill>
@@ -16020,7 +16029,7 @@
               <a:t>];</a:t>
             </a:r>
             <a:br>
-              <a:rPr lang="en-US" altLang="ko-KR" sz="1800" b="0" i="0" u="none" strike="noStrike" dirty="0">
+              <a:rPr lang="en-US" altLang="ko-KR" sz="2000" b="1" i="0" u="none" strike="noStrike" dirty="0">
                 <a:solidFill>
                   <a:srgbClr val="383A42"/>
                 </a:solidFill>
@@ -16029,7 +16038,7 @@
               </a:rPr>
             </a:br>
             <a:r>
-              <a:rPr lang="en-US" altLang="ko-KR" sz="1800" b="0" i="0" u="none" strike="noStrike" dirty="0">
+              <a:rPr lang="en-US" altLang="ko-KR" sz="2000" b="1" i="0" u="none" strike="noStrike" dirty="0">
                 <a:solidFill>
                   <a:srgbClr val="C18401"/>
                 </a:solidFill>
@@ -16039,7 +16048,7 @@
               <a:t>memset</a:t>
             </a:r>
             <a:r>
-              <a:rPr lang="en-US" altLang="ko-KR" sz="1800" b="0" i="0" u="none" strike="noStrike" dirty="0">
+              <a:rPr lang="en-US" altLang="ko-KR" sz="2000" b="1" i="0" u="none" strike="noStrike" dirty="0">
                 <a:solidFill>
                   <a:srgbClr val="383A42"/>
                 </a:solidFill>
@@ -16049,7 +16058,7 @@
               <a:t>(arr, </a:t>
             </a:r>
             <a:r>
-              <a:rPr lang="en-US" altLang="ko-KR" sz="1800" b="0" i="0" u="none" strike="noStrike" dirty="0">
+              <a:rPr lang="en-US" altLang="ko-KR" sz="2000" b="1" i="0" u="none" strike="noStrike" dirty="0">
                 <a:solidFill>
                   <a:srgbClr val="986801"/>
                 </a:solidFill>
@@ -16059,7 +16068,7 @@
               <a:t>0</a:t>
             </a:r>
             <a:r>
-              <a:rPr lang="en-US" altLang="ko-KR" sz="1800" b="0" i="0" u="none" strike="noStrike" dirty="0">
+              <a:rPr lang="en-US" altLang="ko-KR" sz="2000" b="1" i="0" u="none" strike="noStrike" dirty="0">
                 <a:solidFill>
                   <a:srgbClr val="383A42"/>
                 </a:solidFill>
@@ -16069,7 +16078,7 @@
               <a:t>, </a:t>
             </a:r>
             <a:r>
-              <a:rPr lang="en-US" altLang="ko-KR" sz="1800" b="0" i="0" u="none" strike="noStrike" dirty="0">
+              <a:rPr lang="en-US" altLang="ko-KR" sz="2000" b="1" i="0" u="none" strike="noStrike" dirty="0">
                 <a:solidFill>
                   <a:srgbClr val="A626A4"/>
                 </a:solidFill>
@@ -16079,7 +16088,7 @@
               <a:t>sizeof</a:t>
             </a:r>
             <a:r>
-              <a:rPr lang="en-US" altLang="ko-KR" sz="1800" b="0" i="0" u="none" strike="noStrike" dirty="0">
+              <a:rPr lang="en-US" altLang="ko-KR" sz="2000" b="1" i="0" u="none" strike="noStrike" dirty="0">
                 <a:solidFill>
                   <a:srgbClr val="383A42"/>
                 </a:solidFill>
@@ -16089,7 +16098,7 @@
               <a:t>(arr));  </a:t>
             </a:r>
             <a:r>
-              <a:rPr lang="en-US" altLang="ko-KR" sz="1800" b="0" i="1" u="none" strike="noStrike" dirty="0">
+              <a:rPr lang="en-US" altLang="ko-KR" sz="2000" b="1" i="1" u="none" strike="noStrike" dirty="0">
                 <a:solidFill>
                   <a:srgbClr val="A0A1A7"/>
                 </a:solidFill>
@@ -16099,7 +16108,7 @@
               <a:t>// </a:t>
             </a:r>
             <a:r>
-              <a:rPr lang="ko-KR" altLang="en-US" sz="1800" b="0" i="1" u="none" strike="noStrike" dirty="0">
+              <a:rPr lang="ko-KR" altLang="en-US" sz="2000" b="1" i="1" u="none" strike="noStrike" dirty="0">
                 <a:solidFill>
                   <a:srgbClr val="A0A1A7"/>
                 </a:solidFill>
@@ -16109,7 +16118,7 @@
               <a:t>배열의</a:t>
             </a:r>
             <a:r>
-              <a:rPr lang="en-US" altLang="ko-KR" sz="1800" b="0" i="1" u="none" strike="noStrike" dirty="0">
+              <a:rPr lang="en-US" altLang="ko-KR" sz="2000" b="1" i="1" u="none" strike="noStrike" dirty="0">
                 <a:solidFill>
                   <a:srgbClr val="A0A1A7"/>
                 </a:solidFill>
@@ -16119,7 +16128,7 @@
               <a:t> </a:t>
             </a:r>
             <a:r>
-              <a:rPr lang="ko-KR" altLang="en-US" sz="1800" b="0" i="1" u="none" strike="noStrike" dirty="0">
+              <a:rPr lang="ko-KR" altLang="en-US" sz="2000" b="1" i="1" u="none" strike="noStrike" dirty="0">
                 <a:solidFill>
                   <a:srgbClr val="A0A1A7"/>
                 </a:solidFill>
@@ -16129,7 +16138,7 @@
               <a:t>모든 바이트가 </a:t>
             </a:r>
             <a:r>
-              <a:rPr lang="en-US" altLang="ko-KR" sz="1800" b="0" i="1" u="none" strike="noStrike" dirty="0">
+              <a:rPr lang="en-US" altLang="ko-KR" sz="2000" b="1" i="1" u="none" strike="noStrike" dirty="0">
                 <a:solidFill>
                   <a:srgbClr val="A0A1A7"/>
                 </a:solidFill>
@@ -16138,7 +16147,7 @@
               </a:rPr>
               <a:t>0</a:t>
             </a:r>
-            <a:endParaRPr lang="ko-KR" altLang="en-US" sz="1800" dirty="0"/>
+            <a:endParaRPr lang="ko-KR" altLang="en-US" sz="2000" b="1" dirty="0"/>
           </a:p>
         </p:txBody>
       </p:sp>
@@ -16156,8 +16165,8 @@
         </p:nvSpPr>
         <p:spPr>
           <a:xfrm>
-            <a:off x="755576" y="4427820"/>
-            <a:ext cx="7200800" cy="369332"/>
+            <a:off x="395536" y="4276450"/>
+            <a:ext cx="7992888" cy="400110"/>
           </a:xfrm>
           <a:prstGeom prst="rect">
             <a:avLst/>
@@ -16179,7 +16188,7 @@
           <a:lstStyle/>
           <a:p>
             <a:r>
-              <a:rPr lang="en-US" altLang="ko-KR" sz="1800" b="0" i="0" u="none" strike="noStrike" dirty="0">
+              <a:rPr lang="en-US" altLang="ko-KR" sz="2000" b="1" i="0" u="none" strike="noStrike" dirty="0">
                 <a:solidFill>
                   <a:srgbClr val="C18401"/>
                 </a:solidFill>
@@ -16189,7 +16198,7 @@
               <a:t>memset</a:t>
             </a:r>
             <a:r>
-              <a:rPr lang="en-US" altLang="ko-KR" sz="1800" b="0" i="0" u="none" strike="noStrike" dirty="0">
+              <a:rPr lang="en-US" altLang="ko-KR" sz="2000" b="1" i="0" u="none" strike="noStrike" dirty="0">
                 <a:solidFill>
                   <a:srgbClr val="383A42"/>
                 </a:solidFill>
@@ -16199,7 +16208,7 @@
               <a:t>(arr, </a:t>
             </a:r>
             <a:r>
-              <a:rPr lang="en-US" altLang="ko-KR" sz="1800" b="0" i="0" u="none" strike="noStrike" dirty="0">
+              <a:rPr lang="en-US" altLang="ko-KR" sz="2000" b="1" i="0" u="none" strike="noStrike" dirty="0">
                 <a:solidFill>
                   <a:srgbClr val="986801"/>
                 </a:solidFill>
@@ -16209,7 +16218,7 @@
               <a:t>1</a:t>
             </a:r>
             <a:r>
-              <a:rPr lang="en-US" altLang="ko-KR" sz="1800" b="0" i="0" u="none" strike="noStrike" dirty="0">
+              <a:rPr lang="en-US" altLang="ko-KR" sz="2000" b="1" i="0" u="none" strike="noStrike" dirty="0">
                 <a:solidFill>
                   <a:srgbClr val="383A42"/>
                 </a:solidFill>
@@ -16219,7 +16228,7 @@
               <a:t>, </a:t>
             </a:r>
             <a:r>
-              <a:rPr lang="en-US" altLang="ko-KR" sz="1800" b="0" i="0" u="none" strike="noStrike" dirty="0">
+              <a:rPr lang="en-US" altLang="ko-KR" sz="2000" b="1" i="0" u="none" strike="noStrike" dirty="0">
                 <a:solidFill>
                   <a:srgbClr val="A626A4"/>
                 </a:solidFill>
@@ -16229,7 +16238,7 @@
               <a:t>sizeof</a:t>
             </a:r>
             <a:r>
-              <a:rPr lang="en-US" altLang="ko-KR" sz="1800" b="0" i="0" u="none" strike="noStrike" dirty="0">
+              <a:rPr lang="en-US" altLang="ko-KR" sz="2000" b="1" i="0" u="none" strike="noStrike" dirty="0">
                 <a:solidFill>
                   <a:srgbClr val="383A42"/>
                 </a:solidFill>
@@ -16239,7 +16248,7 @@
               <a:t>(arr));  </a:t>
             </a:r>
             <a:r>
-              <a:rPr lang="en-US" altLang="ko-KR" sz="1800" b="0" i="1" u="none" strike="noStrike" dirty="0">
+              <a:rPr lang="en-US" altLang="ko-KR" sz="2000" b="1" i="1" u="none" strike="noStrike" dirty="0">
                 <a:solidFill>
                   <a:srgbClr val="A0A1A7"/>
                 </a:solidFill>
@@ -16249,7 +16258,7 @@
               <a:t>// → 0x01010101</a:t>
             </a:r>
             <a:r>
-              <a:rPr lang="ko-KR" altLang="en-US" sz="1800" b="0" i="1" u="none" strike="noStrike" dirty="0">
+              <a:rPr lang="ko-KR" altLang="en-US" sz="2000" b="1" i="1" u="none" strike="noStrike" dirty="0">
                 <a:solidFill>
                   <a:srgbClr val="A0A1A7"/>
                 </a:solidFill>
@@ -16258,7 +16267,7 @@
               </a:rPr>
               <a:t>로 채워 짐</a:t>
             </a:r>
-            <a:endParaRPr lang="ko-KR" altLang="en-US" sz="1800" dirty="0"/>
+            <a:endParaRPr lang="ko-KR" altLang="en-US" sz="2000" b="1" dirty="0"/>
           </a:p>
         </p:txBody>
       </p:sp>
@@ -17446,7 +17455,7 @@
           <a:lstStyle/>
           <a:p>
             <a:r>
-              <a:rPr lang="en-US" altLang="ko-KR" sz="2400" b="0" i="1" u="none" strike="noStrike" dirty="0">
+              <a:rPr lang="en-US" altLang="ko-KR" sz="2400" b="1" i="1" u="none" strike="noStrike" dirty="0">
                 <a:solidFill>
                   <a:srgbClr val="A0A1A7"/>
                 </a:solidFill>
@@ -17456,7 +17465,7 @@
               <a:t>// </a:t>
             </a:r>
             <a:r>
-              <a:rPr lang="ko-KR" altLang="en-US" sz="2400" b="0" i="1" u="none" strike="noStrike" dirty="0">
+              <a:rPr lang="ko-KR" altLang="en-US" sz="2400" b="1" i="1" u="none" strike="noStrike" dirty="0">
                 <a:solidFill>
                   <a:srgbClr val="A0A1A7"/>
                 </a:solidFill>
@@ -17466,7 +17475,7 @@
               <a:t>안전한 복사</a:t>
             </a:r>
             <a:br>
-              <a:rPr lang="ko-KR" altLang="en-US" sz="2400" b="0" i="0" u="none" strike="noStrike" dirty="0">
+              <a:rPr lang="ko-KR" altLang="en-US" sz="2400" b="1" i="0" u="none" strike="noStrike" dirty="0">
                 <a:solidFill>
                   <a:srgbClr val="383A42"/>
                 </a:solidFill>
@@ -17475,7 +17484,7 @@
               </a:rPr>
             </a:br>
             <a:r>
-              <a:rPr lang="en-US" altLang="ko-KR" sz="2400" b="0" i="0" u="none" strike="noStrike" dirty="0">
+              <a:rPr lang="en-US" altLang="ko-KR" sz="2400" b="1" i="0" u="none" strike="noStrike" dirty="0">
                 <a:solidFill>
                   <a:srgbClr val="A626A4"/>
                 </a:solidFill>
@@ -17485,7 +17494,7 @@
               <a:t>char</a:t>
             </a:r>
             <a:r>
-              <a:rPr lang="en-US" altLang="ko-KR" sz="2400" b="0" i="0" u="none" strike="noStrike" dirty="0">
+              <a:rPr lang="en-US" altLang="ko-KR" sz="2400" b="1" i="0" u="none" strike="noStrike" dirty="0">
                 <a:solidFill>
                   <a:srgbClr val="383A42"/>
                 </a:solidFill>
@@ -17495,7 +17504,7 @@
               <a:t> buffer[</a:t>
             </a:r>
             <a:r>
-              <a:rPr lang="en-US" altLang="ko-KR" sz="2400" b="0" i="0" u="none" strike="noStrike" dirty="0">
+              <a:rPr lang="en-US" altLang="ko-KR" sz="2400" b="1" i="0" u="none" strike="noStrike" dirty="0">
                 <a:solidFill>
                   <a:srgbClr val="986801"/>
                 </a:solidFill>
@@ -17505,7 +17514,7 @@
               <a:t>10</a:t>
             </a:r>
             <a:r>
-              <a:rPr lang="en-US" altLang="ko-KR" sz="2400" b="0" i="0" u="none" strike="noStrike" dirty="0">
+              <a:rPr lang="en-US" altLang="ko-KR" sz="2400" b="1" i="0" u="none" strike="noStrike" dirty="0">
                 <a:solidFill>
                   <a:srgbClr val="383A42"/>
                 </a:solidFill>
@@ -17515,7 +17524,7 @@
               <a:t>] = </a:t>
             </a:r>
             <a:r>
-              <a:rPr lang="en-US" altLang="ko-KR" sz="2400" b="0" i="0" u="none" strike="noStrike" dirty="0">
+              <a:rPr lang="en-US" altLang="ko-KR" sz="2400" b="1" i="0" u="none" strike="noStrike" dirty="0">
                 <a:solidFill>
                   <a:srgbClr val="50A14F"/>
                 </a:solidFill>
@@ -17525,7 +17534,7 @@
               <a:t>"</a:t>
             </a:r>
             <a:r>
-              <a:rPr lang="en-US" altLang="ko-KR" sz="2400" b="0" i="0" u="none" strike="noStrike" dirty="0" err="1">
+              <a:rPr lang="en-US" altLang="ko-KR" sz="2400" b="1" i="0" u="none" strike="noStrike" dirty="0" err="1">
                 <a:solidFill>
                   <a:srgbClr val="50A14F"/>
                 </a:solidFill>
@@ -17535,7 +17544,7 @@
               <a:t>abcdefghi</a:t>
             </a:r>
             <a:r>
-              <a:rPr lang="en-US" altLang="ko-KR" sz="2400" b="0" i="0" u="none" strike="noStrike" dirty="0">
+              <a:rPr lang="en-US" altLang="ko-KR" sz="2400" b="1" i="0" u="none" strike="noStrike" dirty="0">
                 <a:solidFill>
                   <a:srgbClr val="50A14F"/>
                 </a:solidFill>
@@ -17545,7 +17554,7 @@
               <a:t>"</a:t>
             </a:r>
             <a:r>
-              <a:rPr lang="en-US" altLang="ko-KR" sz="2400" b="0" i="0" u="none" strike="noStrike" dirty="0">
+              <a:rPr lang="en-US" altLang="ko-KR" sz="2400" b="1" i="0" u="none" strike="noStrike" dirty="0">
                 <a:solidFill>
                   <a:srgbClr val="383A42"/>
                 </a:solidFill>
@@ -17555,7 +17564,7 @@
               <a:t>;</a:t>
             </a:r>
             <a:br>
-              <a:rPr lang="en-US" altLang="ko-KR" sz="2400" b="0" i="0" u="none" strike="noStrike" dirty="0">
+              <a:rPr lang="en-US" altLang="ko-KR" sz="2400" b="1" i="0" u="none" strike="noStrike" dirty="0">
                 <a:solidFill>
                   <a:srgbClr val="383A42"/>
                 </a:solidFill>
@@ -17564,7 +17573,7 @@
               </a:rPr>
             </a:br>
             <a:r>
-              <a:rPr lang="en-US" altLang="ko-KR" sz="2400" b="0" i="0" u="none" strike="noStrike" dirty="0">
+              <a:rPr lang="en-US" altLang="ko-KR" sz="2400" b="1" i="0" u="none" strike="noStrike" dirty="0">
                 <a:solidFill>
                   <a:srgbClr val="383A42"/>
                 </a:solidFill>
@@ -17574,7 +17583,7 @@
               <a:t>memmove(buffer + </a:t>
             </a:r>
             <a:r>
-              <a:rPr lang="en-US" altLang="ko-KR" sz="2400" b="0" i="0" u="none" strike="noStrike" dirty="0">
+              <a:rPr lang="en-US" altLang="ko-KR" sz="2400" b="1" i="0" u="none" strike="noStrike" dirty="0">
                 <a:solidFill>
                   <a:srgbClr val="986801"/>
                 </a:solidFill>
@@ -17584,7 +17593,7 @@
               <a:t>2</a:t>
             </a:r>
             <a:r>
-              <a:rPr lang="en-US" altLang="ko-KR" sz="2400" b="0" i="0" u="none" strike="noStrike" dirty="0">
+              <a:rPr lang="en-US" altLang="ko-KR" sz="2400" b="1" i="0" u="none" strike="noStrike" dirty="0">
                 <a:solidFill>
                   <a:srgbClr val="383A42"/>
                 </a:solidFill>
@@ -17594,7 +17603,7 @@
               <a:t>, buffer, </a:t>
             </a:r>
             <a:r>
-              <a:rPr lang="en-US" altLang="ko-KR" sz="2400" b="0" i="0" u="none" strike="noStrike" dirty="0">
+              <a:rPr lang="en-US" altLang="ko-KR" sz="2400" b="1" i="0" u="none" strike="noStrike" dirty="0">
                 <a:solidFill>
                   <a:srgbClr val="986801"/>
                 </a:solidFill>
@@ -17604,7 +17613,7 @@
               <a:t>5</a:t>
             </a:r>
             <a:r>
-              <a:rPr lang="en-US" altLang="ko-KR" sz="2400" b="0" i="0" u="none" strike="noStrike" dirty="0">
+              <a:rPr lang="en-US" altLang="ko-KR" sz="2400" b="1" i="0" u="none" strike="noStrike" dirty="0">
                 <a:solidFill>
                   <a:srgbClr val="383A42"/>
                 </a:solidFill>
@@ -17614,7 +17623,7 @@
               <a:t>);  </a:t>
             </a:r>
             <a:r>
-              <a:rPr lang="en-US" altLang="ko-KR" sz="2400" b="0" i="1" u="none" strike="noStrike" dirty="0">
+              <a:rPr lang="en-US" altLang="ko-KR" sz="2400" b="1" i="1" u="none" strike="noStrike" dirty="0">
                 <a:solidFill>
                   <a:srgbClr val="A0A1A7"/>
                 </a:solidFill>
@@ -17624,7 +17633,7 @@
               <a:t>// </a:t>
             </a:r>
             <a:r>
-              <a:rPr lang="ko-KR" altLang="en-US" sz="2400" b="0" i="1" u="none" strike="noStrike" dirty="0">
+              <a:rPr lang="ko-KR" altLang="en-US" sz="2400" b="1" i="1" u="none" strike="noStrike" dirty="0">
                 <a:solidFill>
                   <a:srgbClr val="A0A1A7"/>
                 </a:solidFill>
@@ -17633,7 +17642,7 @@
               </a:rPr>
               <a:t>안전</a:t>
             </a:r>
-            <a:endParaRPr lang="ko-KR" altLang="en-US" dirty="0"/>
+            <a:endParaRPr lang="ko-KR" altLang="en-US" b="1" dirty="0"/>
           </a:p>
         </p:txBody>
       </p:sp>
@@ -18581,7 +18590,7 @@
           <a:lstStyle/>
           <a:p>
             <a:r>
-              <a:rPr lang="en-US" altLang="ko-KR" sz="1400" i="1" dirty="0">
+              <a:rPr lang="en-US" altLang="ko-KR" sz="1400" b="1" i="1" dirty="0">
                 <a:solidFill>
                   <a:srgbClr val="A0A1A7"/>
                 </a:solidFill>
@@ -18590,7 +18599,7 @@
               <a:t>// 1. </a:t>
             </a:r>
             <a:r>
-              <a:rPr lang="ko-KR" altLang="en-US" sz="1400" i="1" dirty="0">
+              <a:rPr lang="ko-KR" altLang="en-US" sz="1400" b="1" i="1" dirty="0">
                 <a:solidFill>
                   <a:srgbClr val="A0A1A7"/>
                 </a:solidFill>
@@ -18599,7 +18608,7 @@
               <a:t>사용자 정의 구조체</a:t>
             </a:r>
             <a:r>
-              <a:rPr lang="en-US" altLang="ko-KR" sz="1400" i="1" dirty="0">
+              <a:rPr lang="en-US" altLang="ko-KR" sz="1400" b="1" i="1" dirty="0">
                 <a:solidFill>
                   <a:srgbClr val="A0A1A7"/>
                 </a:solidFill>
@@ -18607,7 +18616,7 @@
               </a:rPr>
               <a:t>.</a:t>
             </a:r>
-            <a:endParaRPr lang="en-US" altLang="ko-KR" sz="1400" b="0" i="0" u="none" strike="noStrike" dirty="0">
+            <a:endParaRPr lang="en-US" altLang="ko-KR" sz="1400" b="1" i="0" u="none" strike="noStrike" dirty="0">
               <a:solidFill>
                 <a:srgbClr val="A626A4"/>
               </a:solidFill>
@@ -18617,7 +18626,7 @@
           </a:p>
           <a:p>
             <a:r>
-              <a:rPr lang="en-US" altLang="ko-KR" sz="1400" b="0" i="0" u="none" strike="noStrike" dirty="0">
+              <a:rPr lang="en-US" altLang="ko-KR" sz="1400" b="1" i="0" u="none" strike="noStrike" dirty="0">
                 <a:solidFill>
                   <a:srgbClr val="A626A4"/>
                 </a:solidFill>
@@ -18627,7 +18636,7 @@
               <a:t>typedef</a:t>
             </a:r>
             <a:r>
-              <a:rPr lang="en-US" altLang="ko-KR" sz="1400" b="0" i="0" u="none" strike="noStrike" dirty="0">
+              <a:rPr lang="en-US" altLang="ko-KR" sz="1400" b="1" i="0" u="none" strike="noStrike" dirty="0">
                 <a:solidFill>
                   <a:srgbClr val="383A42"/>
                 </a:solidFill>
@@ -18637,7 +18646,7 @@
               <a:t> </a:t>
             </a:r>
             <a:r>
-              <a:rPr lang="en-US" altLang="ko-KR" sz="1400" b="0" i="0" u="none" strike="noStrike" dirty="0">
+              <a:rPr lang="en-US" altLang="ko-KR" sz="1400" b="1" i="0" u="none" strike="noStrike" dirty="0">
                 <a:solidFill>
                   <a:srgbClr val="A626A4"/>
                 </a:solidFill>
@@ -18647,7 +18656,7 @@
               <a:t>struct</a:t>
             </a:r>
             <a:r>
-              <a:rPr lang="en-US" altLang="ko-KR" sz="1400" b="0" i="0" u="none" strike="noStrike" dirty="0">
+              <a:rPr lang="en-US" altLang="ko-KR" sz="1400" b="1" i="0" u="none" strike="noStrike" dirty="0">
                 <a:solidFill>
                   <a:srgbClr val="383A42"/>
                 </a:solidFill>
@@ -18657,7 +18666,7 @@
               <a:t> </a:t>
             </a:r>
             <a:r>
-              <a:rPr lang="en-US" altLang="ko-KR" sz="1400" b="0" i="0" u="none" strike="noStrike" dirty="0">
+              <a:rPr lang="en-US" altLang="ko-KR" sz="1400" b="1" i="0" u="none" strike="noStrike" dirty="0">
                 <a:solidFill>
                   <a:srgbClr val="C18401"/>
                 </a:solidFill>
@@ -18667,7 +18676,7 @@
               <a:t>Player</a:t>
             </a:r>
             <a:br>
-              <a:rPr lang="en-US" altLang="ko-KR" sz="1400" b="0" i="0" u="none" strike="noStrike" dirty="0">
+              <a:rPr lang="en-US" altLang="ko-KR" sz="1400" b="1" i="0" u="none" strike="noStrike" dirty="0">
                 <a:solidFill>
                   <a:srgbClr val="383A42"/>
                 </a:solidFill>
@@ -18676,7 +18685,7 @@
               </a:rPr>
             </a:br>
             <a:r>
-              <a:rPr lang="en-US" altLang="ko-KR" sz="1400" b="0" i="0" u="none" strike="noStrike" dirty="0">
+              <a:rPr lang="en-US" altLang="ko-KR" sz="1400" b="1" i="0" u="none" strike="noStrike" dirty="0">
                 <a:solidFill>
                   <a:srgbClr val="383A42"/>
                 </a:solidFill>
@@ -18686,7 +18695,7 @@
               <a:t>{</a:t>
             </a:r>
             <a:br>
-              <a:rPr lang="en-US" altLang="ko-KR" sz="1400" b="0" i="0" u="none" strike="noStrike" dirty="0">
+              <a:rPr lang="en-US" altLang="ko-KR" sz="1400" b="1" i="0" u="none" strike="noStrike" dirty="0">
                 <a:solidFill>
                   <a:srgbClr val="383A42"/>
                 </a:solidFill>
@@ -18695,7 +18704,7 @@
               </a:rPr>
             </a:br>
             <a:r>
-              <a:rPr lang="en-US" altLang="ko-KR" sz="1400" b="0" i="0" u="none" strike="noStrike" dirty="0">
+              <a:rPr lang="en-US" altLang="ko-KR" sz="1400" b="1" i="0" u="none" strike="noStrike" dirty="0">
                 <a:solidFill>
                   <a:srgbClr val="383A42"/>
                 </a:solidFill>
@@ -18705,7 +18714,7 @@
               <a:t>  </a:t>
             </a:r>
             <a:r>
-              <a:rPr lang="en-US" altLang="ko-KR" sz="1400" b="0" i="0" u="none" strike="noStrike" dirty="0">
+              <a:rPr lang="en-US" altLang="ko-KR" sz="1400" b="1" i="0" u="none" strike="noStrike" dirty="0">
                 <a:solidFill>
                   <a:srgbClr val="A626A4"/>
                 </a:solidFill>
@@ -18715,7 +18724,7 @@
               <a:t>char</a:t>
             </a:r>
             <a:r>
-              <a:rPr lang="en-US" altLang="ko-KR" sz="1400" b="0" i="0" u="none" strike="noStrike" dirty="0">
+              <a:rPr lang="en-US" altLang="ko-KR" sz="1400" b="1" i="0" u="none" strike="noStrike" dirty="0">
                 <a:solidFill>
                   <a:srgbClr val="383A42"/>
                 </a:solidFill>
@@ -18725,7 +18734,7 @@
               <a:t> name[</a:t>
             </a:r>
             <a:r>
-              <a:rPr lang="en-US" altLang="ko-KR" sz="1400" b="0" i="0" u="none" strike="noStrike" dirty="0">
+              <a:rPr lang="en-US" altLang="ko-KR" sz="1400" b="1" i="0" u="none" strike="noStrike" dirty="0">
                 <a:solidFill>
                   <a:srgbClr val="986801"/>
                 </a:solidFill>
@@ -18735,7 +18744,7 @@
               <a:t>32</a:t>
             </a:r>
             <a:r>
-              <a:rPr lang="en-US" altLang="ko-KR" sz="1400" b="0" i="0" u="none" strike="noStrike" dirty="0">
+              <a:rPr lang="en-US" altLang="ko-KR" sz="1400" b="1" i="0" u="none" strike="noStrike" dirty="0">
                 <a:solidFill>
                   <a:srgbClr val="383A42"/>
                 </a:solidFill>
@@ -18745,7 +18754,7 @@
               <a:t>];</a:t>
             </a:r>
             <a:br>
-              <a:rPr lang="en-US" altLang="ko-KR" sz="1400" b="0" i="0" u="none" strike="noStrike" dirty="0">
+              <a:rPr lang="en-US" altLang="ko-KR" sz="1400" b="1" i="0" u="none" strike="noStrike" dirty="0">
                 <a:solidFill>
                   <a:srgbClr val="383A42"/>
                 </a:solidFill>
@@ -18754,7 +18763,7 @@
               </a:rPr>
             </a:br>
             <a:r>
-              <a:rPr lang="en-US" altLang="ko-KR" sz="1400" b="0" i="0" u="none" strike="noStrike" dirty="0">
+              <a:rPr lang="en-US" altLang="ko-KR" sz="1400" b="1" i="0" u="none" strike="noStrike" dirty="0">
                 <a:solidFill>
                   <a:srgbClr val="383A42"/>
                 </a:solidFill>
@@ -18764,7 +18773,7 @@
               <a:t>  </a:t>
             </a:r>
             <a:r>
-              <a:rPr lang="en-US" altLang="ko-KR" sz="1400" b="0" i="0" u="none" strike="noStrike" dirty="0">
+              <a:rPr lang="en-US" altLang="ko-KR" sz="1400" b="1" i="0" u="none" strike="noStrike" dirty="0">
                 <a:solidFill>
                   <a:srgbClr val="A626A4"/>
                 </a:solidFill>
@@ -18774,7 +18783,7 @@
               <a:t>int</a:t>
             </a:r>
             <a:r>
-              <a:rPr lang="en-US" altLang="ko-KR" sz="1400" b="0" i="0" u="none" strike="noStrike" dirty="0">
+              <a:rPr lang="en-US" altLang="ko-KR" sz="1400" b="1" i="0" u="none" strike="noStrike" dirty="0">
                 <a:solidFill>
                   <a:srgbClr val="383A42"/>
                 </a:solidFill>
@@ -18784,7 +18793,7 @@
               <a:t> type; </a:t>
             </a:r>
             <a:r>
-              <a:rPr lang="en-US" altLang="ko-KR" sz="1400" b="0" i="1" u="none" strike="noStrike" dirty="0">
+              <a:rPr lang="en-US" altLang="ko-KR" sz="1400" b="1" i="1" u="none" strike="noStrike" dirty="0">
                 <a:solidFill>
                   <a:srgbClr val="A0A1A7"/>
                 </a:solidFill>
@@ -18794,7 +18803,7 @@
               <a:t>// 1: Knight, 2: Sorcerer</a:t>
             </a:r>
             <a:br>
-              <a:rPr lang="en-US" altLang="ko-KR" sz="1400" b="0" i="0" u="none" strike="noStrike" dirty="0">
+              <a:rPr lang="en-US" altLang="ko-KR" sz="1400" b="1" i="0" u="none" strike="noStrike" dirty="0">
                 <a:solidFill>
                   <a:srgbClr val="383A42"/>
                 </a:solidFill>
@@ -18803,7 +18812,7 @@
               </a:rPr>
             </a:br>
             <a:r>
-              <a:rPr lang="en-US" altLang="ko-KR" sz="1400" b="0" i="0" u="none" strike="noStrike" dirty="0">
+              <a:rPr lang="en-US" altLang="ko-KR" sz="1400" b="1" i="0" u="none" strike="noStrike" dirty="0">
                 <a:solidFill>
                   <a:srgbClr val="383A42"/>
                 </a:solidFill>
@@ -18813,7 +18822,7 @@
               <a:t>  </a:t>
             </a:r>
             <a:r>
-              <a:rPr lang="en-US" altLang="ko-KR" sz="1400" b="0" i="0" u="none" strike="noStrike" dirty="0">
+              <a:rPr lang="en-US" altLang="ko-KR" sz="1400" b="1" i="0" u="none" strike="noStrike" dirty="0">
                 <a:solidFill>
                   <a:srgbClr val="A626A4"/>
                 </a:solidFill>
@@ -18823,7 +18832,7 @@
               <a:t>int</a:t>
             </a:r>
             <a:r>
-              <a:rPr lang="en-US" altLang="ko-KR" sz="1400" b="0" i="0" u="none" strike="noStrike" dirty="0">
+              <a:rPr lang="en-US" altLang="ko-KR" sz="1400" b="1" i="0" u="none" strike="noStrike" dirty="0">
                 <a:solidFill>
                   <a:srgbClr val="383A42"/>
                 </a:solidFill>
@@ -18833,7 +18842,7 @@
               <a:t> attack;</a:t>
             </a:r>
             <a:br>
-              <a:rPr lang="en-US" altLang="ko-KR" sz="1400" b="0" i="0" u="none" strike="noStrike" dirty="0">
+              <a:rPr lang="en-US" altLang="ko-KR" sz="1400" b="1" i="0" u="none" strike="noStrike" dirty="0">
                 <a:solidFill>
                   <a:srgbClr val="383A42"/>
                 </a:solidFill>
@@ -18842,7 +18851,7 @@
               </a:rPr>
             </a:br>
             <a:r>
-              <a:rPr lang="en-US" altLang="ko-KR" sz="1400" b="0" i="0" u="none" strike="noStrike" dirty="0">
+              <a:rPr lang="en-US" altLang="ko-KR" sz="1400" b="1" i="0" u="none" strike="noStrike" dirty="0">
                 <a:solidFill>
                   <a:srgbClr val="383A42"/>
                 </a:solidFill>
@@ -18852,7 +18861,7 @@
               <a:t>  </a:t>
             </a:r>
             <a:r>
-              <a:rPr lang="en-US" altLang="ko-KR" sz="1400" b="0" i="0" u="none" strike="noStrike" dirty="0">
+              <a:rPr lang="en-US" altLang="ko-KR" sz="1400" b="1" i="0" u="none" strike="noStrike" dirty="0">
                 <a:solidFill>
                   <a:srgbClr val="A626A4"/>
                 </a:solidFill>
@@ -18862,7 +18871,7 @@
               <a:t>int</a:t>
             </a:r>
             <a:r>
-              <a:rPr lang="en-US" altLang="ko-KR" sz="1400" b="0" i="0" u="none" strike="noStrike" dirty="0">
+              <a:rPr lang="en-US" altLang="ko-KR" sz="1400" b="1" i="0" u="none" strike="noStrike" dirty="0">
                 <a:solidFill>
                   <a:srgbClr val="383A42"/>
                 </a:solidFill>
@@ -18872,7 +18881,7 @@
               <a:t> hp;</a:t>
             </a:r>
             <a:br>
-              <a:rPr lang="en-US" altLang="ko-KR" sz="1400" b="0" i="0" u="none" strike="noStrike" dirty="0">
+              <a:rPr lang="en-US" altLang="ko-KR" sz="1400" b="1" i="0" u="none" strike="noStrike" dirty="0">
                 <a:solidFill>
                   <a:srgbClr val="383A42"/>
                 </a:solidFill>
@@ -18881,7 +18890,7 @@
               </a:rPr>
             </a:br>
             <a:r>
-              <a:rPr lang="en-US" altLang="ko-KR" sz="1400" b="0" i="0" u="none" strike="noStrike" dirty="0">
+              <a:rPr lang="en-US" altLang="ko-KR" sz="1400" b="1" i="0" u="none" strike="noStrike" dirty="0">
                 <a:solidFill>
                   <a:srgbClr val="383A42"/>
                 </a:solidFill>
@@ -18890,7 +18899,7 @@
               </a:rPr>
               <a:t>} Player;</a:t>
             </a:r>
-            <a:endParaRPr lang="ko-KR" altLang="en-US" sz="1400" dirty="0"/>
+            <a:endParaRPr lang="ko-KR" altLang="en-US" sz="1400" b="1" dirty="0"/>
           </a:p>
         </p:txBody>
       </p:sp>
@@ -18931,7 +18940,7 @@
           <a:lstStyle/>
           <a:p>
             <a:r>
-              <a:rPr lang="en-US" altLang="ko-KR" sz="1400" i="1" dirty="0">
+              <a:rPr lang="en-US" altLang="ko-KR" sz="1400" b="1" i="1" dirty="0">
                 <a:solidFill>
                   <a:srgbClr val="A0A1A7"/>
                 </a:solidFill>
@@ -18940,7 +18949,7 @@
               <a:t>// 3. memset</a:t>
             </a:r>
             <a:r>
-              <a:rPr lang="ko-KR" altLang="en-US" sz="1400" i="1" dirty="0">
+              <a:rPr lang="ko-KR" altLang="en-US" sz="1400" b="1" i="1" dirty="0">
                 <a:solidFill>
                   <a:srgbClr val="A0A1A7"/>
                 </a:solidFill>
@@ -18949,7 +18958,7 @@
               <a:t>으로 구조체를 </a:t>
             </a:r>
             <a:r>
-              <a:rPr lang="en-US" altLang="ko-KR" sz="1400" i="1" dirty="0">
+              <a:rPr lang="en-US" altLang="ko-KR" sz="1400" b="1" i="1" dirty="0">
                 <a:solidFill>
                   <a:srgbClr val="A0A1A7"/>
                 </a:solidFill>
@@ -18958,7 +18967,7 @@
               <a:t>0</a:t>
             </a:r>
             <a:r>
-              <a:rPr lang="ko-KR" altLang="en-US" sz="1400" i="1" dirty="0">
+              <a:rPr lang="ko-KR" altLang="en-US" sz="1400" b="1" i="1" dirty="0">
                 <a:solidFill>
                   <a:srgbClr val="A0A1A7"/>
                 </a:solidFill>
@@ -18967,7 +18976,7 @@
               <a:t>으로 초기화</a:t>
             </a:r>
             <a:r>
-              <a:rPr lang="en-US" altLang="ko-KR" sz="1400" i="1" dirty="0">
+              <a:rPr lang="en-US" altLang="ko-KR" sz="1400" b="1" i="1" dirty="0">
                 <a:solidFill>
                   <a:srgbClr val="A0A1A7"/>
                 </a:solidFill>
@@ -18975,7 +18984,7 @@
               </a:rPr>
               <a:t>.</a:t>
             </a:r>
-            <a:endParaRPr lang="en-US" altLang="ko-KR" sz="1400" dirty="0">
+            <a:endParaRPr lang="en-US" altLang="ko-KR" sz="1400" b="1" dirty="0">
               <a:solidFill>
                 <a:srgbClr val="A626A4"/>
               </a:solidFill>
@@ -18984,7 +18993,7 @@
           </a:p>
           <a:p>
             <a:r>
-              <a:rPr lang="en-US" altLang="ko-KR" sz="1400" b="0" i="0" u="none" strike="noStrike" dirty="0">
+              <a:rPr lang="en-US" altLang="ko-KR" sz="1400" b="1" i="0" u="none" strike="noStrike" dirty="0">
                 <a:solidFill>
                   <a:srgbClr val="C18401"/>
                 </a:solidFill>
@@ -18994,7 +19003,7 @@
               <a:t>memset</a:t>
             </a:r>
             <a:r>
-              <a:rPr lang="en-US" altLang="ko-KR" sz="1400" b="0" i="0" u="none" strike="noStrike" dirty="0">
+              <a:rPr lang="en-US" altLang="ko-KR" sz="1400" b="1" i="0" u="none" strike="noStrike" dirty="0">
                 <a:solidFill>
                   <a:srgbClr val="383A42"/>
                 </a:solidFill>
@@ -19004,7 +19013,7 @@
               <a:t>(player, </a:t>
             </a:r>
             <a:r>
-              <a:rPr lang="en-US" altLang="ko-KR" sz="1400" b="0" i="0" u="none" strike="noStrike" dirty="0">
+              <a:rPr lang="en-US" altLang="ko-KR" sz="1400" b="1" i="0" u="none" strike="noStrike" dirty="0">
                 <a:solidFill>
                   <a:srgbClr val="986801"/>
                 </a:solidFill>
@@ -19014,7 +19023,7 @@
               <a:t>0</a:t>
             </a:r>
             <a:r>
-              <a:rPr lang="en-US" altLang="ko-KR" sz="1400" b="0" i="0" u="none" strike="noStrike" dirty="0">
+              <a:rPr lang="en-US" altLang="ko-KR" sz="1400" b="1" i="0" u="none" strike="noStrike" dirty="0">
                 <a:solidFill>
                   <a:srgbClr val="383A42"/>
                 </a:solidFill>
@@ -19024,7 +19033,7 @@
               <a:t>, </a:t>
             </a:r>
             <a:r>
-              <a:rPr lang="en-US" altLang="ko-KR" sz="1400" b="0" i="0" u="none" strike="noStrike" dirty="0">
+              <a:rPr lang="en-US" altLang="ko-KR" sz="1400" b="1" i="0" u="none" strike="noStrike" dirty="0">
                 <a:solidFill>
                   <a:srgbClr val="A626A4"/>
                 </a:solidFill>
@@ -19034,7 +19043,7 @@
               <a:t>sizeof</a:t>
             </a:r>
             <a:r>
-              <a:rPr lang="en-US" altLang="ko-KR" sz="1400" b="0" i="0" u="none" strike="noStrike" dirty="0">
+              <a:rPr lang="en-US" altLang="ko-KR" sz="1400" b="1" i="0" u="none" strike="noStrike" dirty="0">
                 <a:solidFill>
                   <a:srgbClr val="383A42"/>
                 </a:solidFill>
@@ -19044,7 +19053,7 @@
               <a:t>(Player));</a:t>
             </a:r>
             <a:br>
-              <a:rPr lang="en-US" altLang="ko-KR" sz="1400" b="0" i="0" u="none" strike="noStrike" dirty="0">
+              <a:rPr lang="en-US" altLang="ko-KR" sz="1400" b="1" i="0" u="none" strike="noStrike" dirty="0">
                 <a:solidFill>
                   <a:srgbClr val="383A42"/>
                 </a:solidFill>
@@ -19052,7 +19061,7 @@
                 <a:latin typeface="Consolas" panose="020B0609020204030204" pitchFamily="49" charset="0"/>
               </a:rPr>
             </a:br>
-            <a:endParaRPr lang="en-US" altLang="ko-KR" sz="1400" b="0" i="0" u="none" strike="noStrike" dirty="0">
+            <a:endParaRPr lang="en-US" altLang="ko-KR" sz="1400" b="1" i="0" u="none" strike="noStrike" dirty="0">
               <a:solidFill>
                 <a:srgbClr val="383A42"/>
               </a:solidFill>
@@ -19062,7 +19071,7 @@
           </a:p>
           <a:p>
             <a:r>
-              <a:rPr lang="en-US" altLang="ko-KR" sz="1400" i="1" dirty="0">
+              <a:rPr lang="en-US" altLang="ko-KR" sz="1400" b="1" i="1" dirty="0">
                 <a:solidFill>
                   <a:srgbClr val="A0A1A7"/>
                 </a:solidFill>
@@ -19071,7 +19080,7 @@
               <a:t>// 4. </a:t>
             </a:r>
             <a:r>
-              <a:rPr lang="ko-KR" altLang="en-US" sz="1400" i="1" dirty="0">
+              <a:rPr lang="ko-KR" altLang="en-US" sz="1400" b="1" i="1" dirty="0">
                 <a:solidFill>
                   <a:srgbClr val="A0A1A7"/>
                 </a:solidFill>
@@ -19080,7 +19089,7 @@
               <a:t>구조체 멤버 값 설정</a:t>
             </a:r>
             <a:r>
-              <a:rPr lang="en-US" altLang="ko-KR" sz="1400" i="1" dirty="0">
+              <a:rPr lang="en-US" altLang="ko-KR" sz="1400" b="1" i="1" dirty="0">
                 <a:solidFill>
                   <a:srgbClr val="A0A1A7"/>
                 </a:solidFill>
@@ -19091,7 +19100,7 @@
           </a:p>
           <a:p>
             <a:r>
-              <a:rPr lang="en-US" altLang="ko-KR" sz="1400" b="0" i="0" u="none" strike="noStrike" dirty="0" err="1">
+              <a:rPr lang="en-US" altLang="ko-KR" sz="1400" b="1" i="0" u="none" strike="noStrike" dirty="0" err="1">
                 <a:solidFill>
                   <a:srgbClr val="C18401"/>
                 </a:solidFill>
@@ -19101,7 +19110,7 @@
               <a:t>strcpy</a:t>
             </a:r>
             <a:r>
-              <a:rPr lang="en-US" altLang="ko-KR" sz="1400" b="0" i="0" u="none" strike="noStrike" dirty="0">
+              <a:rPr lang="en-US" altLang="ko-KR" sz="1400" b="1" i="0" u="none" strike="noStrike" dirty="0">
                 <a:solidFill>
                   <a:srgbClr val="383A42"/>
                 </a:solidFill>
@@ -19111,7 +19120,7 @@
               <a:t>(player-&gt;name, </a:t>
             </a:r>
             <a:r>
-              <a:rPr lang="en-US" altLang="ko-KR" sz="1400" b="0" i="0" u="none" strike="noStrike" dirty="0">
+              <a:rPr lang="en-US" altLang="ko-KR" sz="1400" b="1" i="0" u="none" strike="noStrike" dirty="0">
                 <a:solidFill>
                   <a:srgbClr val="50A14F"/>
                 </a:solidFill>
@@ -19121,7 +19130,7 @@
               <a:t>"Knight"</a:t>
             </a:r>
             <a:r>
-              <a:rPr lang="en-US" altLang="ko-KR" sz="1400" b="0" i="0" u="none" strike="noStrike" dirty="0">
+              <a:rPr lang="en-US" altLang="ko-KR" sz="1400" b="1" i="0" u="none" strike="noStrike" dirty="0">
                 <a:solidFill>
                   <a:srgbClr val="383A42"/>
                 </a:solidFill>
@@ -19131,7 +19140,7 @@
               <a:t>);</a:t>
             </a:r>
             <a:br>
-              <a:rPr lang="en-US" altLang="ko-KR" sz="1400" b="0" i="0" u="none" strike="noStrike" dirty="0">
+              <a:rPr lang="en-US" altLang="ko-KR" sz="1400" b="1" i="0" u="none" strike="noStrike" dirty="0">
                 <a:solidFill>
                   <a:srgbClr val="383A42"/>
                 </a:solidFill>
@@ -19140,7 +19149,7 @@
               </a:rPr>
             </a:br>
             <a:r>
-              <a:rPr lang="en-US" altLang="ko-KR" sz="1400" b="0" i="0" u="none" strike="noStrike" dirty="0">
+              <a:rPr lang="en-US" altLang="ko-KR" sz="1400" b="1" i="0" u="none" strike="noStrike" dirty="0">
                 <a:solidFill>
                   <a:srgbClr val="383A42"/>
                 </a:solidFill>
@@ -19150,7 +19159,7 @@
               <a:t>player-&gt;type = </a:t>
             </a:r>
             <a:r>
-              <a:rPr lang="en-US" altLang="ko-KR" sz="1400" b="0" i="0" u="none" strike="noStrike" dirty="0">
+              <a:rPr lang="en-US" altLang="ko-KR" sz="1400" b="1" i="0" u="none" strike="noStrike" dirty="0">
                 <a:solidFill>
                   <a:srgbClr val="986801"/>
                 </a:solidFill>
@@ -19160,7 +19169,7 @@
               <a:t>1</a:t>
             </a:r>
             <a:r>
-              <a:rPr lang="en-US" altLang="ko-KR" sz="1400" b="0" i="0" u="none" strike="noStrike" dirty="0">
+              <a:rPr lang="en-US" altLang="ko-KR" sz="1400" b="1" i="0" u="none" strike="noStrike" dirty="0">
                 <a:solidFill>
                   <a:srgbClr val="383A42"/>
                 </a:solidFill>
@@ -19170,7 +19179,7 @@
               <a:t>;</a:t>
             </a:r>
             <a:br>
-              <a:rPr lang="en-US" altLang="ko-KR" sz="1400" b="0" i="0" u="none" strike="noStrike" dirty="0">
+              <a:rPr lang="en-US" altLang="ko-KR" sz="1400" b="1" i="0" u="none" strike="noStrike" dirty="0">
                 <a:solidFill>
                   <a:srgbClr val="383A42"/>
                 </a:solidFill>
@@ -19179,7 +19188,7 @@
               </a:rPr>
             </a:br>
             <a:r>
-              <a:rPr lang="en-US" altLang="ko-KR" sz="1400" b="0" i="0" u="none" strike="noStrike" dirty="0">
+              <a:rPr lang="en-US" altLang="ko-KR" sz="1400" b="1" i="0" u="none" strike="noStrike" dirty="0">
                 <a:solidFill>
                   <a:srgbClr val="383A42"/>
                 </a:solidFill>
@@ -19189,7 +19198,7 @@
               <a:t>player-&gt;attack = </a:t>
             </a:r>
             <a:r>
-              <a:rPr lang="en-US" altLang="ko-KR" sz="1400" b="0" i="0" u="none" strike="noStrike" dirty="0">
+              <a:rPr lang="en-US" altLang="ko-KR" sz="1400" b="1" i="0" u="none" strike="noStrike" dirty="0">
                 <a:solidFill>
                   <a:srgbClr val="986801"/>
                 </a:solidFill>
@@ -19199,7 +19208,7 @@
               <a:t>20</a:t>
             </a:r>
             <a:r>
-              <a:rPr lang="en-US" altLang="ko-KR" sz="1400" b="0" i="0" u="none" strike="noStrike" dirty="0">
+              <a:rPr lang="en-US" altLang="ko-KR" sz="1400" b="1" i="0" u="none" strike="noStrike" dirty="0">
                 <a:solidFill>
                   <a:srgbClr val="383A42"/>
                 </a:solidFill>
@@ -19209,7 +19218,7 @@
               <a:t>;</a:t>
             </a:r>
             <a:br>
-              <a:rPr lang="en-US" altLang="ko-KR" sz="1400" b="0" i="0" u="none" strike="noStrike" dirty="0">
+              <a:rPr lang="en-US" altLang="ko-KR" sz="1400" b="1" i="0" u="none" strike="noStrike" dirty="0">
                 <a:solidFill>
                   <a:srgbClr val="383A42"/>
                 </a:solidFill>
@@ -19218,7 +19227,7 @@
               </a:rPr>
             </a:br>
             <a:r>
-              <a:rPr lang="en-US" altLang="ko-KR" sz="1400" b="0" i="0" u="none" strike="noStrike" dirty="0">
+              <a:rPr lang="en-US" altLang="ko-KR" sz="1400" b="1" i="0" u="none" strike="noStrike" dirty="0">
                 <a:solidFill>
                   <a:srgbClr val="383A42"/>
                 </a:solidFill>
@@ -19228,7 +19237,7 @@
               <a:t>player-&gt;hp = </a:t>
             </a:r>
             <a:r>
-              <a:rPr lang="en-US" altLang="ko-KR" sz="1400" b="0" i="0" u="none" strike="noStrike" dirty="0">
+              <a:rPr lang="en-US" altLang="ko-KR" sz="1400" b="1" i="0" u="none" strike="noStrike" dirty="0">
                 <a:solidFill>
                   <a:srgbClr val="986801"/>
                 </a:solidFill>
@@ -19238,7 +19247,7 @@
               <a:t>150</a:t>
             </a:r>
             <a:r>
-              <a:rPr lang="en-US" altLang="ko-KR" sz="1400" b="0" i="0" u="none" strike="noStrike" dirty="0">
+              <a:rPr lang="en-US" altLang="ko-KR" sz="1400" b="1" i="0" u="none" strike="noStrike" dirty="0">
                 <a:solidFill>
                   <a:srgbClr val="383A42"/>
                 </a:solidFill>
@@ -19247,7 +19256,7 @@
               </a:rPr>
               <a:t>;</a:t>
             </a:r>
-            <a:endParaRPr lang="ko-KR" altLang="en-US" sz="1400" dirty="0"/>
+            <a:endParaRPr lang="ko-KR" altLang="en-US" sz="1400" b="1" dirty="0"/>
           </a:p>
         </p:txBody>
       </p:sp>
@@ -19288,7 +19297,7 @@
           <a:lstStyle/>
           <a:p>
             <a:r>
-              <a:rPr lang="en-US" altLang="ko-KR" sz="1400" i="1" dirty="0">
+              <a:rPr lang="en-US" altLang="ko-KR" sz="1400" b="1" i="1" dirty="0">
                 <a:solidFill>
                   <a:srgbClr val="A0A1A7"/>
                 </a:solidFill>
@@ -19297,7 +19306,7 @@
               <a:t>// 2. </a:t>
             </a:r>
             <a:r>
-              <a:rPr lang="ko-KR" altLang="en-US" sz="1400" i="1" dirty="0">
+              <a:rPr lang="ko-KR" altLang="en-US" sz="1400" b="1" i="1" dirty="0">
                 <a:solidFill>
                   <a:srgbClr val="A0A1A7"/>
                 </a:solidFill>
@@ -19306,7 +19315,7 @@
               <a:t>구조체를 위한 동적 할당</a:t>
             </a:r>
             <a:r>
-              <a:rPr lang="en-US" altLang="ko-KR" sz="1400" i="1" dirty="0">
+              <a:rPr lang="en-US" altLang="ko-KR" sz="1400" b="1" i="1" dirty="0">
                 <a:solidFill>
                   <a:srgbClr val="A0A1A7"/>
                 </a:solidFill>
@@ -19314,7 +19323,7 @@
               </a:rPr>
               <a:t>.</a:t>
             </a:r>
-            <a:endParaRPr lang="en-US" altLang="ko-KR" sz="1400" dirty="0">
+            <a:endParaRPr lang="en-US" altLang="ko-KR" sz="1400" b="1" dirty="0">
               <a:solidFill>
                 <a:srgbClr val="A626A4"/>
               </a:solidFill>
@@ -19323,7 +19332,7 @@
           </a:p>
           <a:p>
             <a:r>
-              <a:rPr lang="en-US" altLang="ko-KR" sz="1400" b="0" i="0" u="none" strike="noStrike" dirty="0">
+              <a:rPr lang="en-US" altLang="ko-KR" sz="1400" b="1" i="0" u="none" strike="noStrike" dirty="0">
                 <a:solidFill>
                   <a:srgbClr val="383A42"/>
                 </a:solidFill>
@@ -19333,7 +19342,7 @@
               <a:t>Player* player = (Player*)</a:t>
             </a:r>
             <a:r>
-              <a:rPr lang="en-US" altLang="ko-KR" sz="1400" b="0" i="0" u="none" strike="noStrike" dirty="0">
+              <a:rPr lang="en-US" altLang="ko-KR" sz="1400" b="1" i="0" u="none" strike="noStrike" dirty="0">
                 <a:solidFill>
                   <a:srgbClr val="C18401"/>
                 </a:solidFill>
@@ -19343,7 +19352,7 @@
               <a:t>malloc</a:t>
             </a:r>
             <a:r>
-              <a:rPr lang="en-US" altLang="ko-KR" sz="1400" b="0" i="0" u="none" strike="noStrike" dirty="0">
+              <a:rPr lang="en-US" altLang="ko-KR" sz="1400" b="1" i="0" u="none" strike="noStrike" dirty="0">
                 <a:solidFill>
                   <a:srgbClr val="383A42"/>
                 </a:solidFill>
@@ -19353,7 +19362,7 @@
               <a:t>(</a:t>
             </a:r>
             <a:r>
-              <a:rPr lang="en-US" altLang="ko-KR" sz="1400" b="0" i="0" u="none" strike="noStrike" dirty="0">
+              <a:rPr lang="en-US" altLang="ko-KR" sz="1400" b="1" i="0" u="none" strike="noStrike" dirty="0">
                 <a:solidFill>
                   <a:srgbClr val="A626A4"/>
                 </a:solidFill>
@@ -19363,7 +19372,7 @@
               <a:t>sizeof</a:t>
             </a:r>
             <a:r>
-              <a:rPr lang="en-US" altLang="ko-KR" sz="1400" b="0" i="0" u="none" strike="noStrike" dirty="0">
+              <a:rPr lang="en-US" altLang="ko-KR" sz="1400" b="1" i="0" u="none" strike="noStrike" dirty="0">
                 <a:solidFill>
                   <a:srgbClr val="383A42"/>
                 </a:solidFill>
@@ -19373,7 +19382,7 @@
               <a:t>(Player));</a:t>
             </a:r>
             <a:br>
-              <a:rPr lang="en-US" altLang="ko-KR" sz="1400" b="0" i="0" u="none" strike="noStrike" dirty="0">
+              <a:rPr lang="en-US" altLang="ko-KR" sz="1400" b="1" i="0" u="none" strike="noStrike" dirty="0">
                 <a:solidFill>
                   <a:srgbClr val="383A42"/>
                 </a:solidFill>
@@ -19382,7 +19391,7 @@
               </a:rPr>
             </a:br>
             <a:r>
-              <a:rPr lang="en-US" altLang="ko-KR" sz="1400" b="0" i="0" u="none" strike="noStrike" dirty="0">
+              <a:rPr lang="en-US" altLang="ko-KR" sz="1400" b="1" i="0" u="none" strike="noStrike" dirty="0">
                 <a:solidFill>
                   <a:srgbClr val="A626A4"/>
                 </a:solidFill>
@@ -19392,7 +19401,7 @@
               <a:t>if</a:t>
             </a:r>
             <a:r>
-              <a:rPr lang="en-US" altLang="ko-KR" sz="1400" b="0" i="0" u="none" strike="noStrike" dirty="0">
+              <a:rPr lang="en-US" altLang="ko-KR" sz="1400" b="1" i="0" u="none" strike="noStrike" dirty="0">
                 <a:solidFill>
                   <a:srgbClr val="383A42"/>
                 </a:solidFill>
@@ -19402,7 +19411,7 @@
               <a:t>(!player)</a:t>
             </a:r>
             <a:br>
-              <a:rPr lang="en-US" altLang="ko-KR" sz="1400" b="0" i="0" u="none" strike="noStrike" dirty="0">
+              <a:rPr lang="en-US" altLang="ko-KR" sz="1400" b="1" i="0" u="none" strike="noStrike" dirty="0">
                 <a:solidFill>
                   <a:srgbClr val="383A42"/>
                 </a:solidFill>
@@ -19411,7 +19420,7 @@
               </a:rPr>
             </a:br>
             <a:r>
-              <a:rPr lang="en-US" altLang="ko-KR" sz="1400" b="0" i="0" u="none" strike="noStrike" dirty="0">
+              <a:rPr lang="en-US" altLang="ko-KR" sz="1400" b="1" i="0" u="none" strike="noStrike" dirty="0">
                 <a:solidFill>
                   <a:srgbClr val="383A42"/>
                 </a:solidFill>
@@ -19421,7 +19430,7 @@
               <a:t>{</a:t>
             </a:r>
             <a:br>
-              <a:rPr lang="en-US" altLang="ko-KR" sz="1400" b="0" i="0" u="none" strike="noStrike" dirty="0">
+              <a:rPr lang="en-US" altLang="ko-KR" sz="1400" b="1" i="0" u="none" strike="noStrike" dirty="0">
                 <a:solidFill>
                   <a:srgbClr val="383A42"/>
                 </a:solidFill>
@@ -19430,7 +19439,7 @@
               </a:rPr>
             </a:br>
             <a:r>
-              <a:rPr lang="en-US" altLang="ko-KR" sz="1400" b="0" i="0" u="none" strike="noStrike" dirty="0">
+              <a:rPr lang="en-US" altLang="ko-KR" sz="1400" b="1" i="0" u="none" strike="noStrike" dirty="0">
                 <a:solidFill>
                   <a:srgbClr val="383A42"/>
                 </a:solidFill>
@@ -19440,7 +19449,7 @@
               <a:t>  </a:t>
             </a:r>
             <a:r>
-              <a:rPr lang="en-US" altLang="ko-KR" sz="1400" b="0" i="0" u="none" strike="noStrike" dirty="0">
+              <a:rPr lang="en-US" altLang="ko-KR" sz="1400" b="1" i="0" u="none" strike="noStrike" dirty="0">
                 <a:solidFill>
                   <a:srgbClr val="C18401"/>
                 </a:solidFill>
@@ -19450,7 +19459,7 @@
               <a:t>printf</a:t>
             </a:r>
             <a:r>
-              <a:rPr lang="en-US" altLang="ko-KR" sz="1400" b="0" i="0" u="none" strike="noStrike" dirty="0">
+              <a:rPr lang="en-US" altLang="ko-KR" sz="1400" b="1" i="0" u="none" strike="noStrike" dirty="0">
                 <a:solidFill>
                   <a:srgbClr val="383A42"/>
                 </a:solidFill>
@@ -19460,7 +19469,7 @@
               <a:t>(</a:t>
             </a:r>
             <a:r>
-              <a:rPr lang="en-US" altLang="ko-KR" sz="1400" b="0" i="0" u="none" strike="noStrike" dirty="0">
+              <a:rPr lang="en-US" altLang="ko-KR" sz="1400" b="1" i="0" u="none" strike="noStrike" dirty="0">
                 <a:solidFill>
                   <a:srgbClr val="50A14F"/>
                 </a:solidFill>
@@ -19470,7 +19479,7 @@
               <a:t>"</a:t>
             </a:r>
             <a:r>
-              <a:rPr lang="ko-KR" altLang="en-US" sz="1400" b="0" i="0" u="none" strike="noStrike" dirty="0">
+              <a:rPr lang="ko-KR" altLang="en-US" sz="1400" b="1" i="0" u="none" strike="noStrike" dirty="0">
                 <a:solidFill>
                   <a:srgbClr val="50A14F"/>
                 </a:solidFill>
@@ -19480,7 +19489,7 @@
               <a:t>메모리 할당 실패</a:t>
             </a:r>
             <a:r>
-              <a:rPr lang="en-US" altLang="ko-KR" sz="1400" b="0" i="0" u="none" strike="noStrike" dirty="0">
+              <a:rPr lang="en-US" altLang="ko-KR" sz="1400" b="1" i="0" u="none" strike="noStrike" dirty="0">
                 <a:solidFill>
                   <a:srgbClr val="50A14F"/>
                 </a:solidFill>
@@ -19490,7 +19499,7 @@
               <a:t>\n"</a:t>
             </a:r>
             <a:r>
-              <a:rPr lang="en-US" altLang="ko-KR" sz="1400" b="0" i="0" u="none" strike="noStrike" dirty="0">
+              <a:rPr lang="en-US" altLang="ko-KR" sz="1400" b="1" i="0" u="none" strike="noStrike" dirty="0">
                 <a:solidFill>
                   <a:srgbClr val="383A42"/>
                 </a:solidFill>
@@ -19500,7 +19509,7 @@
               <a:t>);</a:t>
             </a:r>
             <a:br>
-              <a:rPr lang="en-US" altLang="ko-KR" sz="1400" b="0" i="0" u="none" strike="noStrike" dirty="0">
+              <a:rPr lang="en-US" altLang="ko-KR" sz="1400" b="1" i="0" u="none" strike="noStrike" dirty="0">
                 <a:solidFill>
                   <a:srgbClr val="383A42"/>
                 </a:solidFill>
@@ -19509,7 +19518,7 @@
               </a:rPr>
             </a:br>
             <a:r>
-              <a:rPr lang="en-US" altLang="ko-KR" sz="1400" b="0" i="0" u="none" strike="noStrike" dirty="0">
+              <a:rPr lang="en-US" altLang="ko-KR" sz="1400" b="1" i="0" u="none" strike="noStrike" dirty="0">
                 <a:solidFill>
                   <a:srgbClr val="383A42"/>
                 </a:solidFill>
@@ -19519,7 +19528,7 @@
               <a:t>  </a:t>
             </a:r>
             <a:r>
-              <a:rPr lang="en-US" altLang="ko-KR" sz="1400" i="1" dirty="0">
+              <a:rPr lang="en-US" altLang="ko-KR" sz="1400" b="1" i="1" dirty="0">
                 <a:solidFill>
                   <a:srgbClr val="A0A1A7"/>
                 </a:solidFill>
@@ -19527,7 +19536,7 @@
               </a:rPr>
               <a:t>// ...</a:t>
             </a:r>
-            <a:endParaRPr lang="ko-KR" altLang="en-US" sz="1400" dirty="0"/>
+            <a:endParaRPr lang="ko-KR" altLang="en-US" sz="1400" b="1" dirty="0"/>
           </a:p>
         </p:txBody>
       </p:sp>
@@ -19545,7 +19554,7 @@
         </p:nvSpPr>
         <p:spPr>
           <a:xfrm>
-            <a:off x="4597504" y="4546178"/>
+            <a:off x="4629807" y="4546178"/>
             <a:ext cx="4041382" cy="1169551"/>
           </a:xfrm>
           <a:prstGeom prst="rect">
@@ -19568,7 +19577,7 @@
           <a:lstStyle/>
           <a:p>
             <a:r>
-              <a:rPr lang="en-US" altLang="ko-KR" sz="1400" b="0" i="1" u="none" strike="noStrike" dirty="0">
+              <a:rPr lang="en-US" altLang="ko-KR" sz="1400" b="1" i="1" u="none" strike="noStrike" dirty="0">
                 <a:solidFill>
                   <a:srgbClr val="A0A1A7"/>
                 </a:solidFill>
@@ -19578,7 +19587,7 @@
               <a:t>// 5. </a:t>
             </a:r>
             <a:r>
-              <a:rPr lang="ko-KR" altLang="en-US" sz="1400" b="0" i="1" u="none" strike="noStrike" dirty="0">
+              <a:rPr lang="ko-KR" altLang="en-US" sz="1400" b="1" i="1" u="none" strike="noStrike" dirty="0">
                 <a:solidFill>
                   <a:srgbClr val="A0A1A7"/>
                 </a:solidFill>
@@ -19588,7 +19597,7 @@
               <a:t>동적할당 메모리 해제</a:t>
             </a:r>
             <a:br>
-              <a:rPr lang="ko-KR" altLang="en-US" sz="1400" b="0" i="0" u="none" strike="noStrike" dirty="0">
+              <a:rPr lang="ko-KR" altLang="en-US" sz="1400" b="1" i="0" u="none" strike="noStrike" dirty="0">
                 <a:solidFill>
                   <a:srgbClr val="383A42"/>
                 </a:solidFill>
@@ -19597,7 +19606,7 @@
               </a:rPr>
             </a:br>
             <a:r>
-              <a:rPr lang="en-US" altLang="ko-KR" sz="1400" b="0" i="0" u="none" strike="noStrike" dirty="0">
+              <a:rPr lang="en-US" altLang="ko-KR" sz="1400" b="1" i="0" u="none" strike="noStrike" dirty="0">
                 <a:solidFill>
                   <a:srgbClr val="C18401"/>
                 </a:solidFill>
@@ -19607,7 +19616,7 @@
               <a:t>free</a:t>
             </a:r>
             <a:r>
-              <a:rPr lang="en-US" altLang="ko-KR" sz="1400" b="0" i="0" u="none" strike="noStrike" dirty="0">
+              <a:rPr lang="en-US" altLang="ko-KR" sz="1400" b="1" i="0" u="none" strike="noStrike" dirty="0">
                 <a:solidFill>
                   <a:srgbClr val="383A42"/>
                 </a:solidFill>
@@ -19618,7 +19627,7 @@
             </a:r>
           </a:p>
           <a:p>
-            <a:endParaRPr lang="en-US" altLang="ko-KR" sz="1400" i="1" dirty="0">
+            <a:endParaRPr lang="en-US" altLang="ko-KR" sz="1400" b="1" i="1" dirty="0">
               <a:solidFill>
                 <a:srgbClr val="A0A1A7"/>
               </a:solidFill>
@@ -19627,7 +19636,7 @@
           </a:p>
           <a:p>
             <a:r>
-              <a:rPr lang="en-US" altLang="ko-KR" sz="1400" i="1" dirty="0">
+              <a:rPr lang="en-US" altLang="ko-KR" sz="1400" b="1" i="1" dirty="0">
                 <a:solidFill>
                   <a:srgbClr val="A0A1A7"/>
                 </a:solidFill>
@@ -19636,7 +19645,7 @@
               <a:t>// </a:t>
             </a:r>
             <a:r>
-              <a:rPr lang="ko-KR" altLang="en-US" sz="1400" i="1" dirty="0" err="1">
+              <a:rPr lang="ko-KR" altLang="en-US" sz="1400" b="1" i="1" dirty="0" err="1">
                 <a:solidFill>
                   <a:srgbClr val="A0A1A7"/>
                 </a:solidFill>
@@ -19645,7 +19654,7 @@
               <a:t>댕글링</a:t>
             </a:r>
             <a:r>
-              <a:rPr lang="ko-KR" altLang="en-US" sz="1400" i="1" dirty="0">
+              <a:rPr lang="ko-KR" altLang="en-US" sz="1400" b="1" i="1" dirty="0">
                 <a:solidFill>
                   <a:srgbClr val="A0A1A7"/>
                 </a:solidFill>
@@ -19654,7 +19663,7 @@
               <a:t> 포인터 방지</a:t>
             </a:r>
             <a:br>
-              <a:rPr lang="ko-KR" altLang="en-US" sz="1400" dirty="0">
+              <a:rPr lang="ko-KR" altLang="en-US" sz="1400" b="1" dirty="0">
                 <a:solidFill>
                   <a:srgbClr val="383A42"/>
                 </a:solidFill>
@@ -19662,7 +19671,7 @@
               </a:rPr>
             </a:br>
             <a:r>
-              <a:rPr lang="en-US" altLang="ko-KR" sz="1400" dirty="0">
+              <a:rPr lang="en-US" altLang="ko-KR" sz="1400" b="1" dirty="0">
                 <a:solidFill>
                   <a:srgbClr val="383A42"/>
                 </a:solidFill>
@@ -19671,7 +19680,7 @@
               <a:t>player = </a:t>
             </a:r>
             <a:r>
-              <a:rPr lang="en-US" altLang="ko-KR" sz="1400" dirty="0">
+              <a:rPr lang="en-US" altLang="ko-KR" sz="1400" b="1" dirty="0">
                 <a:solidFill>
                   <a:srgbClr val="0184BB"/>
                 </a:solidFill>
@@ -19680,7 +19689,7 @@
               <a:t>NULL</a:t>
             </a:r>
             <a:r>
-              <a:rPr lang="en-US" altLang="ko-KR" sz="1400" dirty="0">
+              <a:rPr lang="en-US" altLang="ko-KR" sz="1400" b="1" dirty="0">
                 <a:solidFill>
                   <a:srgbClr val="383A42"/>
                 </a:solidFill>
@@ -19688,7 +19697,7 @@
               </a:rPr>
               <a:t>;</a:t>
             </a:r>
-            <a:endParaRPr lang="ko-KR" altLang="en-US" sz="1400" dirty="0"/>
+            <a:endParaRPr lang="ko-KR" altLang="en-US" sz="1400" b="1" dirty="0"/>
           </a:p>
         </p:txBody>
       </p:sp>
